--- a/PPTs/L0 course overview.pptx
+++ b/PPTs/L0 course overview.pptx
@@ -293,7 +293,7 @@
           <a:p>
             <a:fld id="{42A0EB13-15AA-4F17-85B5-7D7BBF18EB40}" type="datetimeFigureOut">
               <a:rPr lang="en-SE" smtClean="0"/>
-              <a:t>08/30/2026</a:t>
+              <a:t>09/01/2026</a:t>
             </a:fld>
             <a:endParaRPr lang="en-SE"/>
           </a:p>
@@ -940,7 +940,7 @@
           <a:p>
             <a:fld id="{FB221443-D73C-634A-A910-7320408C156D}" type="datetimeFigureOut">
               <a:rPr lang="en-US" smtClean="0"/>
-              <a:t>8/30/2026</a:t>
+              <a:t>9/1/2026</a:t>
             </a:fld>
             <a:endParaRPr lang="en-US"/>
           </a:p>
@@ -1110,7 +1110,7 @@
           <a:p>
             <a:fld id="{FB221443-D73C-634A-A910-7320408C156D}" type="datetimeFigureOut">
               <a:rPr lang="en-US" smtClean="0"/>
-              <a:t>8/30/2026</a:t>
+              <a:t>9/1/2026</a:t>
             </a:fld>
             <a:endParaRPr lang="en-US"/>
           </a:p>
@@ -1290,7 +1290,7 @@
           <a:p>
             <a:fld id="{FB221443-D73C-634A-A910-7320408C156D}" type="datetimeFigureOut">
               <a:rPr lang="en-US" smtClean="0"/>
-              <a:t>8/30/2026</a:t>
+              <a:t>9/1/2026</a:t>
             </a:fld>
             <a:endParaRPr lang="en-US"/>
           </a:p>
@@ -1460,7 +1460,7 @@
           <a:p>
             <a:fld id="{FB221443-D73C-634A-A910-7320408C156D}" type="datetimeFigureOut">
               <a:rPr lang="en-US" smtClean="0"/>
-              <a:t>8/30/2026</a:t>
+              <a:t>9/1/2026</a:t>
             </a:fld>
             <a:endParaRPr lang="en-US"/>
           </a:p>
@@ -1706,7 +1706,7 @@
           <a:p>
             <a:fld id="{FB221443-D73C-634A-A910-7320408C156D}" type="datetimeFigureOut">
               <a:rPr lang="en-US" smtClean="0"/>
-              <a:t>8/30/2026</a:t>
+              <a:t>9/1/2026</a:t>
             </a:fld>
             <a:endParaRPr lang="en-US"/>
           </a:p>
@@ -1994,7 +1994,7 @@
           <a:p>
             <a:fld id="{FB221443-D73C-634A-A910-7320408C156D}" type="datetimeFigureOut">
               <a:rPr lang="en-US" smtClean="0"/>
-              <a:t>8/30/2026</a:t>
+              <a:t>9/1/2026</a:t>
             </a:fld>
             <a:endParaRPr lang="en-US"/>
           </a:p>
@@ -2416,7 +2416,7 @@
           <a:p>
             <a:fld id="{FB221443-D73C-634A-A910-7320408C156D}" type="datetimeFigureOut">
               <a:rPr lang="en-US" smtClean="0"/>
-              <a:t>8/30/2026</a:t>
+              <a:t>9/1/2026</a:t>
             </a:fld>
             <a:endParaRPr lang="en-US"/>
           </a:p>
@@ -2534,7 +2534,7 @@
           <a:p>
             <a:fld id="{FB221443-D73C-634A-A910-7320408C156D}" type="datetimeFigureOut">
               <a:rPr lang="en-US" smtClean="0"/>
-              <a:t>8/30/2026</a:t>
+              <a:t>9/1/2026</a:t>
             </a:fld>
             <a:endParaRPr lang="en-US"/>
           </a:p>
@@ -2629,7 +2629,7 @@
           <a:p>
             <a:fld id="{FB221443-D73C-634A-A910-7320408C156D}" type="datetimeFigureOut">
               <a:rPr lang="en-US" smtClean="0"/>
-              <a:t>8/30/2026</a:t>
+              <a:t>9/1/2026</a:t>
             </a:fld>
             <a:endParaRPr lang="en-US"/>
           </a:p>
@@ -2906,7 +2906,7 @@
           <a:p>
             <a:fld id="{FB221443-D73C-634A-A910-7320408C156D}" type="datetimeFigureOut">
               <a:rPr lang="en-US" smtClean="0"/>
-              <a:t>8/30/2026</a:t>
+              <a:t>9/1/2026</a:t>
             </a:fld>
             <a:endParaRPr lang="en-US"/>
           </a:p>
@@ -3159,7 +3159,7 @@
           <a:p>
             <a:fld id="{FB221443-D73C-634A-A910-7320408C156D}" type="datetimeFigureOut">
               <a:rPr lang="en-US" smtClean="0"/>
-              <a:t>8/30/2026</a:t>
+              <a:t>9/1/2026</a:t>
             </a:fld>
             <a:endParaRPr lang="en-US"/>
           </a:p>
@@ -3372,7 +3372,7 @@
           <a:p>
             <a:fld id="{FB221443-D73C-634A-A910-7320408C156D}" type="datetimeFigureOut">
               <a:rPr lang="en-US" smtClean="0"/>
-              <a:t>8/30/2026</a:t>
+              <a:t>9/1/2026</a:t>
             </a:fld>
             <a:endParaRPr lang="en-US"/>
           </a:p>
@@ -3790,7 +3790,7 @@
               </a:lnSpc>
             </a:pPr>
             <a:r>
-              <a:rPr lang="en-US" altLang="zh-CN" dirty="0">
+              <a:rPr lang="en-US" altLang="zh-CN" sz="3200" dirty="0">
                 <a:solidFill>
                   <a:schemeClr val="accent1"/>
                 </a:solidFill>
@@ -3798,7 +3798,7 @@
               <a:t>Lecture</a:t>
             </a:r>
             <a:r>
-              <a:rPr lang="zh-CN" altLang="en-US" dirty="0">
+              <a:rPr lang="zh-CN" altLang="en-US" sz="3200" dirty="0">
                 <a:solidFill>
                   <a:schemeClr val="accent1"/>
                 </a:solidFill>
@@ -3806,45 +3806,40 @@
               <a:t> </a:t>
             </a:r>
             <a:r>
-              <a:rPr lang="en-US" altLang="zh-CN" dirty="0"/>
+              <a:rPr lang="en-US" altLang="zh-CN" sz="3200" dirty="0"/>
               <a:t>0</a:t>
             </a:r>
             <a:br>
-              <a:rPr lang="en-US" altLang="zh-CN" dirty="0">
+              <a:rPr lang="en-US" altLang="zh-CN" sz="3200" dirty="0">
                 <a:solidFill>
                   <a:schemeClr val="accent1"/>
                 </a:solidFill>
               </a:rPr>
             </a:br>
             <a:r>
-              <a:rPr lang="en-US" altLang="zh-CN" dirty="0">
+              <a:rPr lang="en-US" altLang="zh-CN" sz="3200" dirty="0">
                 <a:solidFill>
                   <a:schemeClr val="accent1"/>
                 </a:solidFill>
               </a:rPr>
-              <a:t>CSC</a:t>
-            </a:r>
-            <a:r>
-              <a:rPr lang="zh-CN" altLang="en-US" dirty="0">
+              <a:t>CSC144V/291R – Special Topic: Autonomous Vehicles </a:t>
+            </a:r>
+            <a:br>
+              <a:rPr lang="en-US" altLang="zh-CN" sz="3200" dirty="0">
                 <a:solidFill>
                   <a:schemeClr val="accent1"/>
                 </a:solidFill>
               </a:rPr>
-              <a:t> </a:t>
-            </a:r>
-            <a:r>
-              <a:rPr lang="en-US" altLang="zh-CN" dirty="0"/>
-              <a:t>144V</a:t>
-            </a:r>
-            <a:r>
-              <a:rPr lang="en-US" altLang="zh-CN" dirty="0">
+            </a:br>
+            <a:r>
+              <a:rPr lang="en-US" altLang="zh-CN" sz="3200" dirty="0">
                 <a:solidFill>
                   <a:schemeClr val="accent1"/>
                 </a:solidFill>
               </a:rPr>
-              <a:t> Course Overview</a:t>
-            </a:r>
-            <a:endParaRPr lang="en-US" dirty="0">
+              <a:t>Course Overview</a:t>
+            </a:r>
+            <a:endParaRPr lang="en-US" sz="3200" dirty="0">
               <a:solidFill>
                 <a:schemeClr val="accent1"/>
               </a:solidFill>
@@ -4051,7 +4046,19 @@
               <a:rPr lang="en-GB" dirty="0">
                 <a:hlinkClick r:id="rId3"/>
               </a:rPr>
-              <a:t>https://guhofstra.github.io/CSC111Sp26/</a:t>
+              <a:t>https://guhofstra.github.io/CSC144</a:t>
+            </a:r>
+            <a:r>
+              <a:rPr lang="en-US" altLang="zh-CN" dirty="0">
+                <a:hlinkClick r:id="rId3"/>
+              </a:rPr>
+              <a:t>V</a:t>
+            </a:r>
+            <a:r>
+              <a:rPr lang="en-GB" dirty="0">
+                <a:hlinkClick r:id="rId3"/>
+              </a:rPr>
+              <a:t>/</a:t>
             </a:r>
             <a:endParaRPr lang="en-GB" dirty="0"/>
           </a:p>
